--- a/fig/chapter3/多样性评估模块.pptx
+++ b/fig/chapter3/多样性评估模块.pptx
@@ -2,12 +2,12 @@
 <file path=ppt/presentation.xml><?xml version="1.0" encoding="utf-8"?>
 <p:presentation xmlns:a="http://schemas.openxmlformats.org/drawingml/2006/main" xmlns:r="http://schemas.openxmlformats.org/officeDocument/2006/relationships" xmlns:p="http://schemas.openxmlformats.org/presentationml/2006/main" saveSubsetFonts="1">
   <p:sldMasterIdLst>
-    <p:sldMasterId id="2147483660" r:id="rId1"/>
+    <p:sldMasterId id="2147483672" r:id="rId1"/>
   </p:sldMasterIdLst>
   <p:sldIdLst>
     <p:sldId id="256" r:id="rId2"/>
   </p:sldIdLst>
-  <p:sldSz cx="5351463" cy="2178050"/>
+  <p:sldSz cx="5351463" cy="1979613"/>
   <p:notesSz cx="6858000" cy="9144000"/>
   <p:defaultTextStyle>
     <a:defPPr>
@@ -104,6 +104,11 @@
       </a:defRPr>
     </a:lvl9pPr>
   </p:defaultTextStyle>
+  <p:extLst>
+    <p:ext uri="{EFAFB233-063F-42B5-8137-9DF3F51BA10A}">
+      <p15:sldGuideLst xmlns:p15="http://schemas.microsoft.com/office/powerpoint/2012/main"/>
+    </p:ext>
+  </p:extLst>
 </p:presentation>
 </file>
 
@@ -136,15 +141,15 @@
         </p:nvSpPr>
         <p:spPr>
           <a:xfrm>
-            <a:off x="668933" y="356454"/>
-            <a:ext cx="4013597" cy="758284"/>
+            <a:off x="668933" y="323978"/>
+            <a:ext cx="4013597" cy="689199"/>
           </a:xfrm>
         </p:spPr>
         <p:txBody>
           <a:bodyPr anchor="b"/>
           <a:lstStyle>
             <a:lvl1pPr algn="ctr">
-              <a:defRPr sz="1906"/>
+              <a:defRPr sz="1732"/>
             </a:lvl1pPr>
           </a:lstStyle>
           <a:p>
@@ -168,8 +173,8 @@
         </p:nvSpPr>
         <p:spPr>
           <a:xfrm>
-            <a:off x="668933" y="1143980"/>
-            <a:ext cx="4013597" cy="525858"/>
+            <a:off x="668933" y="1039755"/>
+            <a:ext cx="4013597" cy="477948"/>
           </a:xfrm>
         </p:spPr>
         <p:txBody>
@@ -177,39 +182,39 @@
           <a:lstStyle>
             <a:lvl1pPr marL="0" indent="0" algn="ctr">
               <a:buNone/>
-              <a:defRPr sz="762"/>
+              <a:defRPr sz="693"/>
             </a:lvl1pPr>
-            <a:lvl2pPr marL="145207" indent="0" algn="ctr">
-              <a:buNone/>
-              <a:defRPr sz="635"/>
+            <a:lvl2pPr marL="131994" indent="0" algn="ctr">
+              <a:buNone/>
+              <a:defRPr sz="577"/>
             </a:lvl2pPr>
-            <a:lvl3pPr marL="290413" indent="0" algn="ctr">
-              <a:buNone/>
-              <a:defRPr sz="572"/>
+            <a:lvl3pPr marL="263987" indent="0" algn="ctr">
+              <a:buNone/>
+              <a:defRPr sz="520"/>
             </a:lvl3pPr>
-            <a:lvl4pPr marL="435620" indent="0" algn="ctr">
-              <a:buNone/>
-              <a:defRPr sz="508"/>
+            <a:lvl4pPr marL="395981" indent="0" algn="ctr">
+              <a:buNone/>
+              <a:defRPr sz="462"/>
             </a:lvl4pPr>
-            <a:lvl5pPr marL="580827" indent="0" algn="ctr">
-              <a:buNone/>
-              <a:defRPr sz="508"/>
+            <a:lvl5pPr marL="527975" indent="0" algn="ctr">
+              <a:buNone/>
+              <a:defRPr sz="462"/>
             </a:lvl5pPr>
-            <a:lvl6pPr marL="726034" indent="0" algn="ctr">
-              <a:buNone/>
-              <a:defRPr sz="508"/>
+            <a:lvl6pPr marL="659968" indent="0" algn="ctr">
+              <a:buNone/>
+              <a:defRPr sz="462"/>
             </a:lvl6pPr>
-            <a:lvl7pPr marL="871240" indent="0" algn="ctr">
-              <a:buNone/>
-              <a:defRPr sz="508"/>
+            <a:lvl7pPr marL="791962" indent="0" algn="ctr">
+              <a:buNone/>
+              <a:defRPr sz="462"/>
             </a:lvl7pPr>
-            <a:lvl8pPr marL="1016447" indent="0" algn="ctr">
-              <a:buNone/>
-              <a:defRPr sz="508"/>
+            <a:lvl8pPr marL="923955" indent="0" algn="ctr">
+              <a:buNone/>
+              <a:defRPr sz="462"/>
             </a:lvl8pPr>
-            <a:lvl9pPr marL="1161654" indent="0" algn="ctr">
-              <a:buNone/>
-              <a:defRPr sz="508"/>
+            <a:lvl9pPr marL="1055949" indent="0" algn="ctr">
+              <a:buNone/>
+              <a:defRPr sz="462"/>
             </a:lvl9pPr>
           </a:lstStyle>
           <a:p>
@@ -238,7 +243,7 @@
           <a:p>
             <a:fld id="{34A1F66C-4B77-4AD7-A093-0F6123A80F07}" type="datetimeFigureOut">
               <a:rPr lang="zh-CN" altLang="en-US" smtClean="0"/>
-              <a:t>2026/3/9</a:t>
+              <a:t>2026/3/19</a:t>
             </a:fld>
             <a:endParaRPr lang="zh-CN" altLang="en-US"/>
           </a:p>
@@ -289,7 +294,7 @@
     </p:spTree>
     <p:extLst>
       <p:ext uri="{BB962C8B-B14F-4D97-AF65-F5344CB8AC3E}">
-        <p14:creationId xmlns:p14="http://schemas.microsoft.com/office/powerpoint/2010/main" val="75882562"/>
+        <p14:creationId xmlns:p14="http://schemas.microsoft.com/office/powerpoint/2010/main" val="545830358"/>
       </p:ext>
     </p:extLst>
   </p:cSld>
@@ -408,7 +413,7 @@
           <a:p>
             <a:fld id="{34A1F66C-4B77-4AD7-A093-0F6123A80F07}" type="datetimeFigureOut">
               <a:rPr lang="zh-CN" altLang="en-US" smtClean="0"/>
-              <a:t>2026/3/9</a:t>
+              <a:t>2026/3/19</a:t>
             </a:fld>
             <a:endParaRPr lang="zh-CN" altLang="en-US"/>
           </a:p>
@@ -459,7 +464,7 @@
     </p:spTree>
     <p:extLst>
       <p:ext uri="{BB962C8B-B14F-4D97-AF65-F5344CB8AC3E}">
-        <p14:creationId xmlns:p14="http://schemas.microsoft.com/office/powerpoint/2010/main" val="661659983"/>
+        <p14:creationId xmlns:p14="http://schemas.microsoft.com/office/powerpoint/2010/main" val="2514033396"/>
       </p:ext>
     </p:extLst>
   </p:cSld>
@@ -498,8 +503,8 @@
         </p:nvSpPr>
         <p:spPr>
           <a:xfrm>
-            <a:off x="3829641" y="115961"/>
-            <a:ext cx="1153909" cy="1845797"/>
+            <a:off x="3829641" y="105396"/>
+            <a:ext cx="1153909" cy="1677631"/>
           </a:xfrm>
         </p:spPr>
         <p:txBody>
@@ -526,8 +531,8 @@
         </p:nvSpPr>
         <p:spPr>
           <a:xfrm>
-            <a:off x="367913" y="115961"/>
-            <a:ext cx="3394834" cy="1845797"/>
+            <a:off x="367913" y="105396"/>
+            <a:ext cx="3394834" cy="1677631"/>
           </a:xfrm>
         </p:spPr>
         <p:txBody>
@@ -588,7 +593,7 @@
           <a:p>
             <a:fld id="{34A1F66C-4B77-4AD7-A093-0F6123A80F07}" type="datetimeFigureOut">
               <a:rPr lang="zh-CN" altLang="en-US" smtClean="0"/>
-              <a:t>2026/3/9</a:t>
+              <a:t>2026/3/19</a:t>
             </a:fld>
             <a:endParaRPr lang="zh-CN" altLang="en-US"/>
           </a:p>
@@ -639,7 +644,7 @@
     </p:spTree>
     <p:extLst>
       <p:ext uri="{BB962C8B-B14F-4D97-AF65-F5344CB8AC3E}">
-        <p14:creationId xmlns:p14="http://schemas.microsoft.com/office/powerpoint/2010/main" val="2588382729"/>
+        <p14:creationId xmlns:p14="http://schemas.microsoft.com/office/powerpoint/2010/main" val="4189460551"/>
       </p:ext>
     </p:extLst>
   </p:cSld>
@@ -758,7 +763,7 @@
           <a:p>
             <a:fld id="{34A1F66C-4B77-4AD7-A093-0F6123A80F07}" type="datetimeFigureOut">
               <a:rPr lang="zh-CN" altLang="en-US" smtClean="0"/>
-              <a:t>2026/3/9</a:t>
+              <a:t>2026/3/19</a:t>
             </a:fld>
             <a:endParaRPr lang="zh-CN" altLang="en-US"/>
           </a:p>
@@ -809,7 +814,7 @@
     </p:spTree>
     <p:extLst>
       <p:ext uri="{BB962C8B-B14F-4D97-AF65-F5344CB8AC3E}">
-        <p14:creationId xmlns:p14="http://schemas.microsoft.com/office/powerpoint/2010/main" val="2483948269"/>
+        <p14:creationId xmlns:p14="http://schemas.microsoft.com/office/powerpoint/2010/main" val="541509346"/>
       </p:ext>
     </p:extLst>
   </p:cSld>
@@ -848,15 +853,15 @@
         </p:nvSpPr>
         <p:spPr>
           <a:xfrm>
-            <a:off x="365126" y="543000"/>
-            <a:ext cx="4615637" cy="906008"/>
+            <a:off x="365126" y="493529"/>
+            <a:ext cx="4615637" cy="823464"/>
           </a:xfrm>
         </p:spPr>
         <p:txBody>
           <a:bodyPr anchor="b"/>
           <a:lstStyle>
             <a:lvl1pPr>
-              <a:defRPr sz="1906"/>
+              <a:defRPr sz="1732"/>
             </a:lvl1pPr>
           </a:lstStyle>
           <a:p>
@@ -880,8 +885,8 @@
         </p:nvSpPr>
         <p:spPr>
           <a:xfrm>
-            <a:off x="365126" y="1457580"/>
-            <a:ext cx="4615637" cy="476448"/>
+            <a:off x="365126" y="1324783"/>
+            <a:ext cx="4615637" cy="433040"/>
           </a:xfrm>
         </p:spPr>
         <p:txBody>
@@ -889,7 +894,7 @@
           <a:lstStyle>
             <a:lvl1pPr marL="0" indent="0">
               <a:buNone/>
-              <a:defRPr sz="762">
+              <a:defRPr sz="693">
                 <a:solidFill>
                   <a:schemeClr val="tx1">
                     <a:tint val="75000"/>
@@ -897,9 +902,9 @@
                 </a:solidFill>
               </a:defRPr>
             </a:lvl1pPr>
-            <a:lvl2pPr marL="145207" indent="0">
-              <a:buNone/>
-              <a:defRPr sz="635">
+            <a:lvl2pPr marL="131994" indent="0">
+              <a:buNone/>
+              <a:defRPr sz="577">
                 <a:solidFill>
                   <a:schemeClr val="tx1">
                     <a:tint val="75000"/>
@@ -907,9 +912,9 @@
                 </a:solidFill>
               </a:defRPr>
             </a:lvl2pPr>
-            <a:lvl3pPr marL="290413" indent="0">
-              <a:buNone/>
-              <a:defRPr sz="572">
+            <a:lvl3pPr marL="263987" indent="0">
+              <a:buNone/>
+              <a:defRPr sz="520">
                 <a:solidFill>
                   <a:schemeClr val="tx1">
                     <a:tint val="75000"/>
@@ -917,9 +922,9 @@
                 </a:solidFill>
               </a:defRPr>
             </a:lvl3pPr>
-            <a:lvl4pPr marL="435620" indent="0">
-              <a:buNone/>
-              <a:defRPr sz="508">
+            <a:lvl4pPr marL="395981" indent="0">
+              <a:buNone/>
+              <a:defRPr sz="462">
                 <a:solidFill>
                   <a:schemeClr val="tx1">
                     <a:tint val="75000"/>
@@ -927,9 +932,9 @@
                 </a:solidFill>
               </a:defRPr>
             </a:lvl4pPr>
-            <a:lvl5pPr marL="580827" indent="0">
-              <a:buNone/>
-              <a:defRPr sz="508">
+            <a:lvl5pPr marL="527975" indent="0">
+              <a:buNone/>
+              <a:defRPr sz="462">
                 <a:solidFill>
                   <a:schemeClr val="tx1">
                     <a:tint val="75000"/>
@@ -937,9 +942,9 @@
                 </a:solidFill>
               </a:defRPr>
             </a:lvl5pPr>
-            <a:lvl6pPr marL="726034" indent="0">
-              <a:buNone/>
-              <a:defRPr sz="508">
+            <a:lvl6pPr marL="659968" indent="0">
+              <a:buNone/>
+              <a:defRPr sz="462">
                 <a:solidFill>
                   <a:schemeClr val="tx1">
                     <a:tint val="75000"/>
@@ -947,9 +952,9 @@
                 </a:solidFill>
               </a:defRPr>
             </a:lvl6pPr>
-            <a:lvl7pPr marL="871240" indent="0">
-              <a:buNone/>
-              <a:defRPr sz="508">
+            <a:lvl7pPr marL="791962" indent="0">
+              <a:buNone/>
+              <a:defRPr sz="462">
                 <a:solidFill>
                   <a:schemeClr val="tx1">
                     <a:tint val="75000"/>
@@ -957,9 +962,9 @@
                 </a:solidFill>
               </a:defRPr>
             </a:lvl7pPr>
-            <a:lvl8pPr marL="1016447" indent="0">
-              <a:buNone/>
-              <a:defRPr sz="508">
+            <a:lvl8pPr marL="923955" indent="0">
+              <a:buNone/>
+              <a:defRPr sz="462">
                 <a:solidFill>
                   <a:schemeClr val="tx1">
                     <a:tint val="75000"/>
@@ -967,9 +972,9 @@
                 </a:solidFill>
               </a:defRPr>
             </a:lvl8pPr>
-            <a:lvl9pPr marL="1161654" indent="0">
-              <a:buNone/>
-              <a:defRPr sz="508">
+            <a:lvl9pPr marL="1055949" indent="0">
+              <a:buNone/>
+              <a:defRPr sz="462">
                 <a:solidFill>
                   <a:schemeClr val="tx1">
                     <a:tint val="75000"/>
@@ -1004,7 +1009,7 @@
           <a:p>
             <a:fld id="{34A1F66C-4B77-4AD7-A093-0F6123A80F07}" type="datetimeFigureOut">
               <a:rPr lang="zh-CN" altLang="en-US" smtClean="0"/>
-              <a:t>2026/3/9</a:t>
+              <a:t>2026/3/19</a:t>
             </a:fld>
             <a:endParaRPr lang="zh-CN" altLang="en-US"/>
           </a:p>
@@ -1055,7 +1060,7 @@
     </p:spTree>
     <p:extLst>
       <p:ext uri="{BB962C8B-B14F-4D97-AF65-F5344CB8AC3E}">
-        <p14:creationId xmlns:p14="http://schemas.microsoft.com/office/powerpoint/2010/main" val="2067331239"/>
+        <p14:creationId xmlns:p14="http://schemas.microsoft.com/office/powerpoint/2010/main" val="1329873564"/>
       </p:ext>
     </p:extLst>
   </p:cSld>
@@ -1117,8 +1122,8 @@
         </p:nvSpPr>
         <p:spPr>
           <a:xfrm>
-            <a:off x="367913" y="579805"/>
-            <a:ext cx="2274372" cy="1381953"/>
+            <a:off x="367913" y="526980"/>
+            <a:ext cx="2274372" cy="1256046"/>
           </a:xfrm>
         </p:spPr>
         <p:txBody>
@@ -1174,8 +1179,8 @@
         </p:nvSpPr>
         <p:spPr>
           <a:xfrm>
-            <a:off x="2709178" y="579805"/>
-            <a:ext cx="2274372" cy="1381953"/>
+            <a:off x="2709178" y="526980"/>
+            <a:ext cx="2274372" cy="1256046"/>
           </a:xfrm>
         </p:spPr>
         <p:txBody>
@@ -1236,7 +1241,7 @@
           <a:p>
             <a:fld id="{34A1F66C-4B77-4AD7-A093-0F6123A80F07}" type="datetimeFigureOut">
               <a:rPr lang="zh-CN" altLang="en-US" smtClean="0"/>
-              <a:t>2026/3/9</a:t>
+              <a:t>2026/3/19</a:t>
             </a:fld>
             <a:endParaRPr lang="zh-CN" altLang="en-US"/>
           </a:p>
@@ -1287,7 +1292,7 @@
     </p:spTree>
     <p:extLst>
       <p:ext uri="{BB962C8B-B14F-4D97-AF65-F5344CB8AC3E}">
-        <p14:creationId xmlns:p14="http://schemas.microsoft.com/office/powerpoint/2010/main" val="207244663"/>
+        <p14:creationId xmlns:p14="http://schemas.microsoft.com/office/powerpoint/2010/main" val="4230347249"/>
       </p:ext>
     </p:extLst>
   </p:cSld>
@@ -1326,8 +1331,8 @@
         </p:nvSpPr>
         <p:spPr>
           <a:xfrm>
-            <a:off x="368610" y="115961"/>
-            <a:ext cx="4615637" cy="420989"/>
+            <a:off x="368610" y="105396"/>
+            <a:ext cx="4615637" cy="382634"/>
           </a:xfrm>
         </p:spPr>
         <p:txBody>
@@ -1354,8 +1359,8 @@
         </p:nvSpPr>
         <p:spPr>
           <a:xfrm>
-            <a:off x="368611" y="533925"/>
-            <a:ext cx="2263919" cy="261668"/>
+            <a:off x="368611" y="485280"/>
+            <a:ext cx="2263919" cy="237828"/>
           </a:xfrm>
         </p:spPr>
         <p:txBody>
@@ -1363,39 +1368,39 @@
           <a:lstStyle>
             <a:lvl1pPr marL="0" indent="0">
               <a:buNone/>
-              <a:defRPr sz="762" b="1"/>
+              <a:defRPr sz="693" b="1"/>
             </a:lvl1pPr>
-            <a:lvl2pPr marL="145207" indent="0">
-              <a:buNone/>
-              <a:defRPr sz="635" b="1"/>
+            <a:lvl2pPr marL="131994" indent="0">
+              <a:buNone/>
+              <a:defRPr sz="577" b="1"/>
             </a:lvl2pPr>
-            <a:lvl3pPr marL="290413" indent="0">
-              <a:buNone/>
-              <a:defRPr sz="572" b="1"/>
+            <a:lvl3pPr marL="263987" indent="0">
+              <a:buNone/>
+              <a:defRPr sz="520" b="1"/>
             </a:lvl3pPr>
-            <a:lvl4pPr marL="435620" indent="0">
-              <a:buNone/>
-              <a:defRPr sz="508" b="1"/>
+            <a:lvl4pPr marL="395981" indent="0">
+              <a:buNone/>
+              <a:defRPr sz="462" b="1"/>
             </a:lvl4pPr>
-            <a:lvl5pPr marL="580827" indent="0">
-              <a:buNone/>
-              <a:defRPr sz="508" b="1"/>
+            <a:lvl5pPr marL="527975" indent="0">
+              <a:buNone/>
+              <a:defRPr sz="462" b="1"/>
             </a:lvl5pPr>
-            <a:lvl6pPr marL="726034" indent="0">
-              <a:buNone/>
-              <a:defRPr sz="508" b="1"/>
+            <a:lvl6pPr marL="659968" indent="0">
+              <a:buNone/>
+              <a:defRPr sz="462" b="1"/>
             </a:lvl6pPr>
-            <a:lvl7pPr marL="871240" indent="0">
-              <a:buNone/>
-              <a:defRPr sz="508" b="1"/>
+            <a:lvl7pPr marL="791962" indent="0">
+              <a:buNone/>
+              <a:defRPr sz="462" b="1"/>
             </a:lvl7pPr>
-            <a:lvl8pPr marL="1016447" indent="0">
-              <a:buNone/>
-              <a:defRPr sz="508" b="1"/>
+            <a:lvl8pPr marL="923955" indent="0">
+              <a:buNone/>
+              <a:defRPr sz="462" b="1"/>
             </a:lvl8pPr>
-            <a:lvl9pPr marL="1161654" indent="0">
-              <a:buNone/>
-              <a:defRPr sz="508" b="1"/>
+            <a:lvl9pPr marL="1055949" indent="0">
+              <a:buNone/>
+              <a:defRPr sz="462" b="1"/>
             </a:lvl9pPr>
           </a:lstStyle>
           <a:p>
@@ -1419,8 +1424,8 @@
         </p:nvSpPr>
         <p:spPr>
           <a:xfrm>
-            <a:off x="368611" y="795593"/>
-            <a:ext cx="2263919" cy="1170198"/>
+            <a:off x="368611" y="723109"/>
+            <a:ext cx="2263919" cy="1063584"/>
           </a:xfrm>
         </p:spPr>
         <p:txBody>
@@ -1476,8 +1481,8 @@
         </p:nvSpPr>
         <p:spPr>
           <a:xfrm>
-            <a:off x="2709178" y="533925"/>
-            <a:ext cx="2275069" cy="261668"/>
+            <a:off x="2709178" y="485280"/>
+            <a:ext cx="2275069" cy="237828"/>
           </a:xfrm>
         </p:spPr>
         <p:txBody>
@@ -1485,39 +1490,39 @@
           <a:lstStyle>
             <a:lvl1pPr marL="0" indent="0">
               <a:buNone/>
-              <a:defRPr sz="762" b="1"/>
+              <a:defRPr sz="693" b="1"/>
             </a:lvl1pPr>
-            <a:lvl2pPr marL="145207" indent="0">
-              <a:buNone/>
-              <a:defRPr sz="635" b="1"/>
+            <a:lvl2pPr marL="131994" indent="0">
+              <a:buNone/>
+              <a:defRPr sz="577" b="1"/>
             </a:lvl2pPr>
-            <a:lvl3pPr marL="290413" indent="0">
-              <a:buNone/>
-              <a:defRPr sz="572" b="1"/>
+            <a:lvl3pPr marL="263987" indent="0">
+              <a:buNone/>
+              <a:defRPr sz="520" b="1"/>
             </a:lvl3pPr>
-            <a:lvl4pPr marL="435620" indent="0">
-              <a:buNone/>
-              <a:defRPr sz="508" b="1"/>
+            <a:lvl4pPr marL="395981" indent="0">
+              <a:buNone/>
+              <a:defRPr sz="462" b="1"/>
             </a:lvl4pPr>
-            <a:lvl5pPr marL="580827" indent="0">
-              <a:buNone/>
-              <a:defRPr sz="508" b="1"/>
+            <a:lvl5pPr marL="527975" indent="0">
+              <a:buNone/>
+              <a:defRPr sz="462" b="1"/>
             </a:lvl5pPr>
-            <a:lvl6pPr marL="726034" indent="0">
-              <a:buNone/>
-              <a:defRPr sz="508" b="1"/>
+            <a:lvl6pPr marL="659968" indent="0">
+              <a:buNone/>
+              <a:defRPr sz="462" b="1"/>
             </a:lvl6pPr>
-            <a:lvl7pPr marL="871240" indent="0">
-              <a:buNone/>
-              <a:defRPr sz="508" b="1"/>
+            <a:lvl7pPr marL="791962" indent="0">
+              <a:buNone/>
+              <a:defRPr sz="462" b="1"/>
             </a:lvl7pPr>
-            <a:lvl8pPr marL="1016447" indent="0">
-              <a:buNone/>
-              <a:defRPr sz="508" b="1"/>
+            <a:lvl8pPr marL="923955" indent="0">
+              <a:buNone/>
+              <a:defRPr sz="462" b="1"/>
             </a:lvl8pPr>
-            <a:lvl9pPr marL="1161654" indent="0">
-              <a:buNone/>
-              <a:defRPr sz="508" b="1"/>
+            <a:lvl9pPr marL="1055949" indent="0">
+              <a:buNone/>
+              <a:defRPr sz="462" b="1"/>
             </a:lvl9pPr>
           </a:lstStyle>
           <a:p>
@@ -1541,8 +1546,8 @@
         </p:nvSpPr>
         <p:spPr>
           <a:xfrm>
-            <a:off x="2709178" y="795593"/>
-            <a:ext cx="2275069" cy="1170198"/>
+            <a:off x="2709178" y="723109"/>
+            <a:ext cx="2275069" cy="1063584"/>
           </a:xfrm>
         </p:spPr>
         <p:txBody>
@@ -1603,7 +1608,7 @@
           <a:p>
             <a:fld id="{34A1F66C-4B77-4AD7-A093-0F6123A80F07}" type="datetimeFigureOut">
               <a:rPr lang="zh-CN" altLang="en-US" smtClean="0"/>
-              <a:t>2026/3/9</a:t>
+              <a:t>2026/3/19</a:t>
             </a:fld>
             <a:endParaRPr lang="zh-CN" altLang="en-US"/>
           </a:p>
@@ -1654,7 +1659,7 @@
     </p:spTree>
     <p:extLst>
       <p:ext uri="{BB962C8B-B14F-4D97-AF65-F5344CB8AC3E}">
-        <p14:creationId xmlns:p14="http://schemas.microsoft.com/office/powerpoint/2010/main" val="1367369905"/>
+        <p14:creationId xmlns:p14="http://schemas.microsoft.com/office/powerpoint/2010/main" val="718304612"/>
       </p:ext>
     </p:extLst>
   </p:cSld>
@@ -1721,7 +1726,7 @@
           <a:p>
             <a:fld id="{34A1F66C-4B77-4AD7-A093-0F6123A80F07}" type="datetimeFigureOut">
               <a:rPr lang="zh-CN" altLang="en-US" smtClean="0"/>
-              <a:t>2026/3/9</a:t>
+              <a:t>2026/3/19</a:t>
             </a:fld>
             <a:endParaRPr lang="zh-CN" altLang="en-US"/>
           </a:p>
@@ -1772,7 +1777,7 @@
     </p:spTree>
     <p:extLst>
       <p:ext uri="{BB962C8B-B14F-4D97-AF65-F5344CB8AC3E}">
-        <p14:creationId xmlns:p14="http://schemas.microsoft.com/office/powerpoint/2010/main" val="2706019634"/>
+        <p14:creationId xmlns:p14="http://schemas.microsoft.com/office/powerpoint/2010/main" val="3462961986"/>
       </p:ext>
     </p:extLst>
   </p:cSld>
@@ -1816,7 +1821,7 @@
           <a:p>
             <a:fld id="{34A1F66C-4B77-4AD7-A093-0F6123A80F07}" type="datetimeFigureOut">
               <a:rPr lang="zh-CN" altLang="en-US" smtClean="0"/>
-              <a:t>2026/3/9</a:t>
+              <a:t>2026/3/19</a:t>
             </a:fld>
             <a:endParaRPr lang="zh-CN" altLang="en-US"/>
           </a:p>
@@ -1867,7 +1872,7 @@
     </p:spTree>
     <p:extLst>
       <p:ext uri="{BB962C8B-B14F-4D97-AF65-F5344CB8AC3E}">
-        <p14:creationId xmlns:p14="http://schemas.microsoft.com/office/powerpoint/2010/main" val="285112622"/>
+        <p14:creationId xmlns:p14="http://schemas.microsoft.com/office/powerpoint/2010/main" val="3498791971"/>
       </p:ext>
     </p:extLst>
   </p:cSld>
@@ -1906,15 +1911,15 @@
         </p:nvSpPr>
         <p:spPr>
           <a:xfrm>
-            <a:off x="368610" y="145203"/>
-            <a:ext cx="1725986" cy="508212"/>
+            <a:off x="368610" y="131974"/>
+            <a:ext cx="1725986" cy="461910"/>
           </a:xfrm>
         </p:spPr>
         <p:txBody>
           <a:bodyPr anchor="b"/>
           <a:lstStyle>
             <a:lvl1pPr>
-              <a:defRPr sz="1016"/>
+              <a:defRPr sz="924"/>
             </a:lvl1pPr>
           </a:lstStyle>
           <a:p>
@@ -1938,39 +1943,39 @@
         </p:nvSpPr>
         <p:spPr>
           <a:xfrm>
-            <a:off x="2275069" y="313599"/>
-            <a:ext cx="2709178" cy="1547827"/>
+            <a:off x="2275069" y="285028"/>
+            <a:ext cx="2709178" cy="1406808"/>
           </a:xfrm>
         </p:spPr>
         <p:txBody>
           <a:bodyPr/>
           <a:lstStyle>
             <a:lvl1pPr>
-              <a:defRPr sz="1016"/>
+              <a:defRPr sz="924"/>
             </a:lvl1pPr>
             <a:lvl2pPr>
-              <a:defRPr sz="889"/>
+              <a:defRPr sz="808"/>
             </a:lvl2pPr>
             <a:lvl3pPr>
-              <a:defRPr sz="762"/>
+              <a:defRPr sz="693"/>
             </a:lvl3pPr>
             <a:lvl4pPr>
-              <a:defRPr sz="635"/>
+              <a:defRPr sz="577"/>
             </a:lvl4pPr>
             <a:lvl5pPr>
-              <a:defRPr sz="635"/>
+              <a:defRPr sz="577"/>
             </a:lvl5pPr>
             <a:lvl6pPr>
-              <a:defRPr sz="635"/>
+              <a:defRPr sz="577"/>
             </a:lvl6pPr>
             <a:lvl7pPr>
-              <a:defRPr sz="635"/>
+              <a:defRPr sz="577"/>
             </a:lvl7pPr>
             <a:lvl8pPr>
-              <a:defRPr sz="635"/>
+              <a:defRPr sz="577"/>
             </a:lvl8pPr>
             <a:lvl9pPr>
-              <a:defRPr sz="635"/>
+              <a:defRPr sz="577"/>
             </a:lvl9pPr>
           </a:lstStyle>
           <a:p>
@@ -2023,8 +2028,8 @@
         </p:nvSpPr>
         <p:spPr>
           <a:xfrm>
-            <a:off x="368610" y="653415"/>
-            <a:ext cx="1725986" cy="1210532"/>
+            <a:off x="368610" y="593884"/>
+            <a:ext cx="1725986" cy="1100243"/>
           </a:xfrm>
         </p:spPr>
         <p:txBody>
@@ -2032,39 +2037,39 @@
           <a:lstStyle>
             <a:lvl1pPr marL="0" indent="0">
               <a:buNone/>
-              <a:defRPr sz="508"/>
+              <a:defRPr sz="462"/>
             </a:lvl1pPr>
-            <a:lvl2pPr marL="145207" indent="0">
-              <a:buNone/>
-              <a:defRPr sz="445"/>
+            <a:lvl2pPr marL="131994" indent="0">
+              <a:buNone/>
+              <a:defRPr sz="404"/>
             </a:lvl2pPr>
-            <a:lvl3pPr marL="290413" indent="0">
-              <a:buNone/>
-              <a:defRPr sz="381"/>
+            <a:lvl3pPr marL="263987" indent="0">
+              <a:buNone/>
+              <a:defRPr sz="346"/>
             </a:lvl3pPr>
-            <a:lvl4pPr marL="435620" indent="0">
-              <a:buNone/>
-              <a:defRPr sz="318"/>
+            <a:lvl4pPr marL="395981" indent="0">
+              <a:buNone/>
+              <a:defRPr sz="289"/>
             </a:lvl4pPr>
-            <a:lvl5pPr marL="580827" indent="0">
-              <a:buNone/>
-              <a:defRPr sz="318"/>
+            <a:lvl5pPr marL="527975" indent="0">
+              <a:buNone/>
+              <a:defRPr sz="289"/>
             </a:lvl5pPr>
-            <a:lvl6pPr marL="726034" indent="0">
-              <a:buNone/>
-              <a:defRPr sz="318"/>
+            <a:lvl6pPr marL="659968" indent="0">
+              <a:buNone/>
+              <a:defRPr sz="289"/>
             </a:lvl6pPr>
-            <a:lvl7pPr marL="871240" indent="0">
-              <a:buNone/>
-              <a:defRPr sz="318"/>
+            <a:lvl7pPr marL="791962" indent="0">
+              <a:buNone/>
+              <a:defRPr sz="289"/>
             </a:lvl7pPr>
-            <a:lvl8pPr marL="1016447" indent="0">
-              <a:buNone/>
-              <a:defRPr sz="318"/>
+            <a:lvl8pPr marL="923955" indent="0">
+              <a:buNone/>
+              <a:defRPr sz="289"/>
             </a:lvl8pPr>
-            <a:lvl9pPr marL="1161654" indent="0">
-              <a:buNone/>
-              <a:defRPr sz="318"/>
+            <a:lvl9pPr marL="1055949" indent="0">
+              <a:buNone/>
+              <a:defRPr sz="289"/>
             </a:lvl9pPr>
           </a:lstStyle>
           <a:p>
@@ -2093,7 +2098,7 @@
           <a:p>
             <a:fld id="{34A1F66C-4B77-4AD7-A093-0F6123A80F07}" type="datetimeFigureOut">
               <a:rPr lang="zh-CN" altLang="en-US" smtClean="0"/>
-              <a:t>2026/3/9</a:t>
+              <a:t>2026/3/19</a:t>
             </a:fld>
             <a:endParaRPr lang="zh-CN" altLang="en-US"/>
           </a:p>
@@ -2144,7 +2149,7 @@
     </p:spTree>
     <p:extLst>
       <p:ext uri="{BB962C8B-B14F-4D97-AF65-F5344CB8AC3E}">
-        <p14:creationId xmlns:p14="http://schemas.microsoft.com/office/powerpoint/2010/main" val="3987544334"/>
+        <p14:creationId xmlns:p14="http://schemas.microsoft.com/office/powerpoint/2010/main" val="1154468494"/>
       </p:ext>
     </p:extLst>
   </p:cSld>
@@ -2183,15 +2188,15 @@
         </p:nvSpPr>
         <p:spPr>
           <a:xfrm>
-            <a:off x="368610" y="145203"/>
-            <a:ext cx="1725986" cy="508212"/>
+            <a:off x="368610" y="131974"/>
+            <a:ext cx="1725986" cy="461910"/>
           </a:xfrm>
         </p:spPr>
         <p:txBody>
           <a:bodyPr anchor="b"/>
           <a:lstStyle>
             <a:lvl1pPr>
-              <a:defRPr sz="1016"/>
+              <a:defRPr sz="924"/>
             </a:lvl1pPr>
           </a:lstStyle>
           <a:p>
@@ -2215,8 +2220,8 @@
         </p:nvSpPr>
         <p:spPr>
           <a:xfrm>
-            <a:off x="2275069" y="313599"/>
-            <a:ext cx="2709178" cy="1547827"/>
+            <a:off x="2275069" y="285028"/>
+            <a:ext cx="2709178" cy="1406808"/>
           </a:xfrm>
         </p:spPr>
         <p:txBody>
@@ -2224,39 +2229,39 @@
           <a:lstStyle>
             <a:lvl1pPr marL="0" indent="0">
               <a:buNone/>
-              <a:defRPr sz="1016"/>
+              <a:defRPr sz="924"/>
             </a:lvl1pPr>
-            <a:lvl2pPr marL="145207" indent="0">
-              <a:buNone/>
-              <a:defRPr sz="889"/>
+            <a:lvl2pPr marL="131994" indent="0">
+              <a:buNone/>
+              <a:defRPr sz="808"/>
             </a:lvl2pPr>
-            <a:lvl3pPr marL="290413" indent="0">
-              <a:buNone/>
-              <a:defRPr sz="762"/>
+            <a:lvl3pPr marL="263987" indent="0">
+              <a:buNone/>
+              <a:defRPr sz="693"/>
             </a:lvl3pPr>
-            <a:lvl4pPr marL="435620" indent="0">
-              <a:buNone/>
-              <a:defRPr sz="635"/>
+            <a:lvl4pPr marL="395981" indent="0">
+              <a:buNone/>
+              <a:defRPr sz="577"/>
             </a:lvl4pPr>
-            <a:lvl5pPr marL="580827" indent="0">
-              <a:buNone/>
-              <a:defRPr sz="635"/>
+            <a:lvl5pPr marL="527975" indent="0">
+              <a:buNone/>
+              <a:defRPr sz="577"/>
             </a:lvl5pPr>
-            <a:lvl6pPr marL="726034" indent="0">
-              <a:buNone/>
-              <a:defRPr sz="635"/>
+            <a:lvl6pPr marL="659968" indent="0">
+              <a:buNone/>
+              <a:defRPr sz="577"/>
             </a:lvl6pPr>
-            <a:lvl7pPr marL="871240" indent="0">
-              <a:buNone/>
-              <a:defRPr sz="635"/>
+            <a:lvl7pPr marL="791962" indent="0">
+              <a:buNone/>
+              <a:defRPr sz="577"/>
             </a:lvl7pPr>
-            <a:lvl8pPr marL="1016447" indent="0">
-              <a:buNone/>
-              <a:defRPr sz="635"/>
+            <a:lvl8pPr marL="923955" indent="0">
+              <a:buNone/>
+              <a:defRPr sz="577"/>
             </a:lvl8pPr>
-            <a:lvl9pPr marL="1161654" indent="0">
-              <a:buNone/>
-              <a:defRPr sz="635"/>
+            <a:lvl9pPr marL="1055949" indent="0">
+              <a:buNone/>
+              <a:defRPr sz="577"/>
             </a:lvl9pPr>
           </a:lstStyle>
           <a:p>
@@ -2280,8 +2285,8 @@
         </p:nvSpPr>
         <p:spPr>
           <a:xfrm>
-            <a:off x="368610" y="653415"/>
-            <a:ext cx="1725986" cy="1210532"/>
+            <a:off x="368610" y="593884"/>
+            <a:ext cx="1725986" cy="1100243"/>
           </a:xfrm>
         </p:spPr>
         <p:txBody>
@@ -2289,39 +2294,39 @@
           <a:lstStyle>
             <a:lvl1pPr marL="0" indent="0">
               <a:buNone/>
-              <a:defRPr sz="508"/>
+              <a:defRPr sz="462"/>
             </a:lvl1pPr>
-            <a:lvl2pPr marL="145207" indent="0">
-              <a:buNone/>
-              <a:defRPr sz="445"/>
+            <a:lvl2pPr marL="131994" indent="0">
+              <a:buNone/>
+              <a:defRPr sz="404"/>
             </a:lvl2pPr>
-            <a:lvl3pPr marL="290413" indent="0">
-              <a:buNone/>
-              <a:defRPr sz="381"/>
+            <a:lvl3pPr marL="263987" indent="0">
+              <a:buNone/>
+              <a:defRPr sz="346"/>
             </a:lvl3pPr>
-            <a:lvl4pPr marL="435620" indent="0">
-              <a:buNone/>
-              <a:defRPr sz="318"/>
+            <a:lvl4pPr marL="395981" indent="0">
+              <a:buNone/>
+              <a:defRPr sz="289"/>
             </a:lvl4pPr>
-            <a:lvl5pPr marL="580827" indent="0">
-              <a:buNone/>
-              <a:defRPr sz="318"/>
+            <a:lvl5pPr marL="527975" indent="0">
+              <a:buNone/>
+              <a:defRPr sz="289"/>
             </a:lvl5pPr>
-            <a:lvl6pPr marL="726034" indent="0">
-              <a:buNone/>
-              <a:defRPr sz="318"/>
+            <a:lvl6pPr marL="659968" indent="0">
+              <a:buNone/>
+              <a:defRPr sz="289"/>
             </a:lvl6pPr>
-            <a:lvl7pPr marL="871240" indent="0">
-              <a:buNone/>
-              <a:defRPr sz="318"/>
+            <a:lvl7pPr marL="791962" indent="0">
+              <a:buNone/>
+              <a:defRPr sz="289"/>
             </a:lvl7pPr>
-            <a:lvl8pPr marL="1016447" indent="0">
-              <a:buNone/>
-              <a:defRPr sz="318"/>
+            <a:lvl8pPr marL="923955" indent="0">
+              <a:buNone/>
+              <a:defRPr sz="289"/>
             </a:lvl8pPr>
-            <a:lvl9pPr marL="1161654" indent="0">
-              <a:buNone/>
-              <a:defRPr sz="318"/>
+            <a:lvl9pPr marL="1055949" indent="0">
+              <a:buNone/>
+              <a:defRPr sz="289"/>
             </a:lvl9pPr>
           </a:lstStyle>
           <a:p>
@@ -2350,7 +2355,7 @@
           <a:p>
             <a:fld id="{34A1F66C-4B77-4AD7-A093-0F6123A80F07}" type="datetimeFigureOut">
               <a:rPr lang="zh-CN" altLang="en-US" smtClean="0"/>
-              <a:t>2026/3/9</a:t>
+              <a:t>2026/3/19</a:t>
             </a:fld>
             <a:endParaRPr lang="zh-CN" altLang="en-US"/>
           </a:p>
@@ -2401,7 +2406,7 @@
     </p:spTree>
     <p:extLst>
       <p:ext uri="{BB962C8B-B14F-4D97-AF65-F5344CB8AC3E}">
-        <p14:creationId xmlns:p14="http://schemas.microsoft.com/office/powerpoint/2010/main" val="274574526"/>
+        <p14:creationId xmlns:p14="http://schemas.microsoft.com/office/powerpoint/2010/main" val="1115805492"/>
       </p:ext>
     </p:extLst>
   </p:cSld>
@@ -2445,8 +2450,8 @@
         </p:nvSpPr>
         <p:spPr>
           <a:xfrm>
-            <a:off x="367913" y="115961"/>
-            <a:ext cx="4615637" cy="420989"/>
+            <a:off x="367913" y="105396"/>
+            <a:ext cx="4615637" cy="382634"/>
           </a:xfrm>
           <a:prstGeom prst="rect">
             <a:avLst/>
@@ -2478,8 +2483,8 @@
         </p:nvSpPr>
         <p:spPr>
           <a:xfrm>
-            <a:off x="367913" y="579805"/>
-            <a:ext cx="4615637" cy="1381953"/>
+            <a:off x="367913" y="526980"/>
+            <a:ext cx="4615637" cy="1256046"/>
           </a:xfrm>
           <a:prstGeom prst="rect">
             <a:avLst/>
@@ -2540,8 +2545,8 @@
         </p:nvSpPr>
         <p:spPr>
           <a:xfrm>
-            <a:off x="367913" y="2018730"/>
-            <a:ext cx="1204079" cy="115961"/>
+            <a:off x="367913" y="1834808"/>
+            <a:ext cx="1204079" cy="105396"/>
           </a:xfrm>
           <a:prstGeom prst="rect">
             <a:avLst/>
@@ -2551,7 +2556,7 @@
           <a:bodyPr vert="horz" lIns="91440" tIns="45720" rIns="91440" bIns="45720" rtlCol="0" anchor="ctr"/>
           <a:lstStyle>
             <a:lvl1pPr algn="l">
-              <a:defRPr sz="381">
+              <a:defRPr sz="346">
                 <a:solidFill>
                   <a:schemeClr val="tx1">
                     <a:tint val="75000"/>
@@ -2563,7 +2568,7 @@
           <a:p>
             <a:fld id="{34A1F66C-4B77-4AD7-A093-0F6123A80F07}" type="datetimeFigureOut">
               <a:rPr lang="zh-CN" altLang="en-US" smtClean="0"/>
-              <a:t>2026/3/9</a:t>
+              <a:t>2026/3/19</a:t>
             </a:fld>
             <a:endParaRPr lang="zh-CN" altLang="en-US"/>
           </a:p>
@@ -2581,8 +2586,8 @@
         </p:nvSpPr>
         <p:spPr>
           <a:xfrm>
-            <a:off x="1772672" y="2018730"/>
-            <a:ext cx="1806119" cy="115961"/>
+            <a:off x="1772672" y="1834808"/>
+            <a:ext cx="1806119" cy="105396"/>
           </a:xfrm>
           <a:prstGeom prst="rect">
             <a:avLst/>
@@ -2592,7 +2597,7 @@
           <a:bodyPr vert="horz" lIns="91440" tIns="45720" rIns="91440" bIns="45720" rtlCol="0" anchor="ctr"/>
           <a:lstStyle>
             <a:lvl1pPr algn="ctr">
-              <a:defRPr sz="381">
+              <a:defRPr sz="346">
                 <a:solidFill>
                   <a:schemeClr val="tx1">
                     <a:tint val="75000"/>
@@ -2618,8 +2623,8 @@
         </p:nvSpPr>
         <p:spPr>
           <a:xfrm>
-            <a:off x="3779471" y="2018730"/>
-            <a:ext cx="1204079" cy="115961"/>
+            <a:off x="3779471" y="1834808"/>
+            <a:ext cx="1204079" cy="105396"/>
           </a:xfrm>
           <a:prstGeom prst="rect">
             <a:avLst/>
@@ -2629,7 +2634,7 @@
           <a:bodyPr vert="horz" lIns="91440" tIns="45720" rIns="91440" bIns="45720" rtlCol="0" anchor="ctr"/>
           <a:lstStyle>
             <a:lvl1pPr algn="r">
-              <a:defRPr sz="381">
+              <a:defRPr sz="346">
                 <a:solidFill>
                   <a:schemeClr val="tx1">
                     <a:tint val="75000"/>
@@ -2650,27 +2655,27 @@
     </p:spTree>
     <p:extLst>
       <p:ext uri="{BB962C8B-B14F-4D97-AF65-F5344CB8AC3E}">
-        <p14:creationId xmlns:p14="http://schemas.microsoft.com/office/powerpoint/2010/main" val="650281403"/>
+        <p14:creationId xmlns:p14="http://schemas.microsoft.com/office/powerpoint/2010/main" val="925942272"/>
       </p:ext>
     </p:extLst>
   </p:cSld>
   <p:clrMap bg1="lt1" tx1="dk1" bg2="lt2" tx2="dk2" accent1="accent1" accent2="accent2" accent3="accent3" accent4="accent4" accent5="accent5" accent6="accent6" hlink="hlink" folHlink="folHlink"/>
   <p:sldLayoutIdLst>
-    <p:sldLayoutId id="2147483661" r:id="rId1"/>
-    <p:sldLayoutId id="2147483662" r:id="rId2"/>
-    <p:sldLayoutId id="2147483663" r:id="rId3"/>
-    <p:sldLayoutId id="2147483664" r:id="rId4"/>
-    <p:sldLayoutId id="2147483665" r:id="rId5"/>
-    <p:sldLayoutId id="2147483666" r:id="rId6"/>
-    <p:sldLayoutId id="2147483667" r:id="rId7"/>
-    <p:sldLayoutId id="2147483668" r:id="rId8"/>
-    <p:sldLayoutId id="2147483669" r:id="rId9"/>
-    <p:sldLayoutId id="2147483670" r:id="rId10"/>
-    <p:sldLayoutId id="2147483671" r:id="rId11"/>
+    <p:sldLayoutId id="2147483673" r:id="rId1"/>
+    <p:sldLayoutId id="2147483674" r:id="rId2"/>
+    <p:sldLayoutId id="2147483675" r:id="rId3"/>
+    <p:sldLayoutId id="2147483676" r:id="rId4"/>
+    <p:sldLayoutId id="2147483677" r:id="rId5"/>
+    <p:sldLayoutId id="2147483678" r:id="rId6"/>
+    <p:sldLayoutId id="2147483679" r:id="rId7"/>
+    <p:sldLayoutId id="2147483680" r:id="rId8"/>
+    <p:sldLayoutId id="2147483681" r:id="rId9"/>
+    <p:sldLayoutId id="2147483682" r:id="rId10"/>
+    <p:sldLayoutId id="2147483683" r:id="rId11"/>
   </p:sldLayoutIdLst>
   <p:txStyles>
     <p:titleStyle>
-      <a:lvl1pPr algn="l" defTabSz="290413" rtl="0" eaLnBrk="1" latinLnBrk="0" hangingPunct="1">
+      <a:lvl1pPr algn="l" defTabSz="263987" rtl="0" eaLnBrk="1" latinLnBrk="0" hangingPunct="1">
         <a:lnSpc>
           <a:spcPct val="90000"/>
         </a:lnSpc>
@@ -2678,7 +2683,7 @@
           <a:spcPct val="0"/>
         </a:spcBef>
         <a:buNone/>
-        <a:defRPr sz="1397" kern="1200">
+        <a:defRPr sz="1270" kern="1200">
           <a:solidFill>
             <a:schemeClr val="tx1"/>
           </a:solidFill>
@@ -2689,16 +2694,16 @@
       </a:lvl1pPr>
     </p:titleStyle>
     <p:bodyStyle>
-      <a:lvl1pPr marL="72603" indent="-72603" algn="l" defTabSz="290413" rtl="0" eaLnBrk="1" latinLnBrk="0" hangingPunct="1">
+      <a:lvl1pPr marL="65997" indent="-65997" algn="l" defTabSz="263987" rtl="0" eaLnBrk="1" latinLnBrk="0" hangingPunct="1">
         <a:lnSpc>
           <a:spcPct val="90000"/>
         </a:lnSpc>
         <a:spcBef>
-          <a:spcPts val="318"/>
+          <a:spcPts val="289"/>
         </a:spcBef>
         <a:buFont typeface="Arial" panose="020B0604020202020204" pitchFamily="34" charset="0"/>
         <a:buChar char="•"/>
-        <a:defRPr sz="889" kern="1200">
+        <a:defRPr sz="808" kern="1200">
           <a:solidFill>
             <a:schemeClr val="tx1"/>
           </a:solidFill>
@@ -2707,16 +2712,16 @@
           <a:cs typeface="+mn-cs"/>
         </a:defRPr>
       </a:lvl1pPr>
-      <a:lvl2pPr marL="217810" indent="-72603" algn="l" defTabSz="290413" rtl="0" eaLnBrk="1" latinLnBrk="0" hangingPunct="1">
+      <a:lvl2pPr marL="197990" indent="-65997" algn="l" defTabSz="263987" rtl="0" eaLnBrk="1" latinLnBrk="0" hangingPunct="1">
         <a:lnSpc>
           <a:spcPct val="90000"/>
         </a:lnSpc>
         <a:spcBef>
-          <a:spcPts val="159"/>
+          <a:spcPts val="144"/>
         </a:spcBef>
         <a:buFont typeface="Arial" panose="020B0604020202020204" pitchFamily="34" charset="0"/>
         <a:buChar char="•"/>
-        <a:defRPr sz="762" kern="1200">
+        <a:defRPr sz="693" kern="1200">
           <a:solidFill>
             <a:schemeClr val="tx1"/>
           </a:solidFill>
@@ -2725,16 +2730,16 @@
           <a:cs typeface="+mn-cs"/>
         </a:defRPr>
       </a:lvl2pPr>
-      <a:lvl3pPr marL="363017" indent="-72603" algn="l" defTabSz="290413" rtl="0" eaLnBrk="1" latinLnBrk="0" hangingPunct="1">
+      <a:lvl3pPr marL="329984" indent="-65997" algn="l" defTabSz="263987" rtl="0" eaLnBrk="1" latinLnBrk="0" hangingPunct="1">
         <a:lnSpc>
           <a:spcPct val="90000"/>
         </a:lnSpc>
         <a:spcBef>
-          <a:spcPts val="159"/>
+          <a:spcPts val="144"/>
         </a:spcBef>
         <a:buFont typeface="Arial" panose="020B0604020202020204" pitchFamily="34" charset="0"/>
         <a:buChar char="•"/>
-        <a:defRPr sz="635" kern="1200">
+        <a:defRPr sz="577" kern="1200">
           <a:solidFill>
             <a:schemeClr val="tx1"/>
           </a:solidFill>
@@ -2743,16 +2748,16 @@
           <a:cs typeface="+mn-cs"/>
         </a:defRPr>
       </a:lvl3pPr>
-      <a:lvl4pPr marL="508224" indent="-72603" algn="l" defTabSz="290413" rtl="0" eaLnBrk="1" latinLnBrk="0" hangingPunct="1">
+      <a:lvl4pPr marL="461978" indent="-65997" algn="l" defTabSz="263987" rtl="0" eaLnBrk="1" latinLnBrk="0" hangingPunct="1">
         <a:lnSpc>
           <a:spcPct val="90000"/>
         </a:lnSpc>
         <a:spcBef>
-          <a:spcPts val="159"/>
+          <a:spcPts val="144"/>
         </a:spcBef>
         <a:buFont typeface="Arial" panose="020B0604020202020204" pitchFamily="34" charset="0"/>
         <a:buChar char="•"/>
-        <a:defRPr sz="572" kern="1200">
+        <a:defRPr sz="520" kern="1200">
           <a:solidFill>
             <a:schemeClr val="tx1"/>
           </a:solidFill>
@@ -2761,16 +2766,16 @@
           <a:cs typeface="+mn-cs"/>
         </a:defRPr>
       </a:lvl4pPr>
-      <a:lvl5pPr marL="653430" indent="-72603" algn="l" defTabSz="290413" rtl="0" eaLnBrk="1" latinLnBrk="0" hangingPunct="1">
+      <a:lvl5pPr marL="593971" indent="-65997" algn="l" defTabSz="263987" rtl="0" eaLnBrk="1" latinLnBrk="0" hangingPunct="1">
         <a:lnSpc>
           <a:spcPct val="90000"/>
         </a:lnSpc>
         <a:spcBef>
-          <a:spcPts val="159"/>
+          <a:spcPts val="144"/>
         </a:spcBef>
         <a:buFont typeface="Arial" panose="020B0604020202020204" pitchFamily="34" charset="0"/>
         <a:buChar char="•"/>
-        <a:defRPr sz="572" kern="1200">
+        <a:defRPr sz="520" kern="1200">
           <a:solidFill>
             <a:schemeClr val="tx1"/>
           </a:solidFill>
@@ -2779,16 +2784,16 @@
           <a:cs typeface="+mn-cs"/>
         </a:defRPr>
       </a:lvl5pPr>
-      <a:lvl6pPr marL="798637" indent="-72603" algn="l" defTabSz="290413" rtl="0" eaLnBrk="1" latinLnBrk="0" hangingPunct="1">
+      <a:lvl6pPr marL="725965" indent="-65997" algn="l" defTabSz="263987" rtl="0" eaLnBrk="1" latinLnBrk="0" hangingPunct="1">
         <a:lnSpc>
           <a:spcPct val="90000"/>
         </a:lnSpc>
         <a:spcBef>
-          <a:spcPts val="159"/>
+          <a:spcPts val="144"/>
         </a:spcBef>
         <a:buFont typeface="Arial" panose="020B0604020202020204" pitchFamily="34" charset="0"/>
         <a:buChar char="•"/>
-        <a:defRPr sz="572" kern="1200">
+        <a:defRPr sz="520" kern="1200">
           <a:solidFill>
             <a:schemeClr val="tx1"/>
           </a:solidFill>
@@ -2797,16 +2802,16 @@
           <a:cs typeface="+mn-cs"/>
         </a:defRPr>
       </a:lvl6pPr>
-      <a:lvl7pPr marL="943844" indent="-72603" algn="l" defTabSz="290413" rtl="0" eaLnBrk="1" latinLnBrk="0" hangingPunct="1">
+      <a:lvl7pPr marL="857959" indent="-65997" algn="l" defTabSz="263987" rtl="0" eaLnBrk="1" latinLnBrk="0" hangingPunct="1">
         <a:lnSpc>
           <a:spcPct val="90000"/>
         </a:lnSpc>
         <a:spcBef>
-          <a:spcPts val="159"/>
+          <a:spcPts val="144"/>
         </a:spcBef>
         <a:buFont typeface="Arial" panose="020B0604020202020204" pitchFamily="34" charset="0"/>
         <a:buChar char="•"/>
-        <a:defRPr sz="572" kern="1200">
+        <a:defRPr sz="520" kern="1200">
           <a:solidFill>
             <a:schemeClr val="tx1"/>
           </a:solidFill>
@@ -2815,16 +2820,16 @@
           <a:cs typeface="+mn-cs"/>
         </a:defRPr>
       </a:lvl7pPr>
-      <a:lvl8pPr marL="1089050" indent="-72603" algn="l" defTabSz="290413" rtl="0" eaLnBrk="1" latinLnBrk="0" hangingPunct="1">
+      <a:lvl8pPr marL="989952" indent="-65997" algn="l" defTabSz="263987" rtl="0" eaLnBrk="1" latinLnBrk="0" hangingPunct="1">
         <a:lnSpc>
           <a:spcPct val="90000"/>
         </a:lnSpc>
         <a:spcBef>
-          <a:spcPts val="159"/>
+          <a:spcPts val="144"/>
         </a:spcBef>
         <a:buFont typeface="Arial" panose="020B0604020202020204" pitchFamily="34" charset="0"/>
         <a:buChar char="•"/>
-        <a:defRPr sz="572" kern="1200">
+        <a:defRPr sz="520" kern="1200">
           <a:solidFill>
             <a:schemeClr val="tx1"/>
           </a:solidFill>
@@ -2833,16 +2838,16 @@
           <a:cs typeface="+mn-cs"/>
         </a:defRPr>
       </a:lvl8pPr>
-      <a:lvl9pPr marL="1234257" indent="-72603" algn="l" defTabSz="290413" rtl="0" eaLnBrk="1" latinLnBrk="0" hangingPunct="1">
+      <a:lvl9pPr marL="1121946" indent="-65997" algn="l" defTabSz="263987" rtl="0" eaLnBrk="1" latinLnBrk="0" hangingPunct="1">
         <a:lnSpc>
           <a:spcPct val="90000"/>
         </a:lnSpc>
         <a:spcBef>
-          <a:spcPts val="159"/>
+          <a:spcPts val="144"/>
         </a:spcBef>
         <a:buFont typeface="Arial" panose="020B0604020202020204" pitchFamily="34" charset="0"/>
         <a:buChar char="•"/>
-        <a:defRPr sz="572" kern="1200">
+        <a:defRPr sz="520" kern="1200">
           <a:solidFill>
             <a:schemeClr val="tx1"/>
           </a:solidFill>
@@ -2856,8 +2861,8 @@
       <a:defPPr>
         <a:defRPr lang="en-US"/>
       </a:defPPr>
-      <a:lvl1pPr marL="0" algn="l" defTabSz="290413" rtl="0" eaLnBrk="1" latinLnBrk="0" hangingPunct="1">
-        <a:defRPr sz="572" kern="1200">
+      <a:lvl1pPr marL="0" algn="l" defTabSz="263987" rtl="0" eaLnBrk="1" latinLnBrk="0" hangingPunct="1">
+        <a:defRPr sz="520" kern="1200">
           <a:solidFill>
             <a:schemeClr val="tx1"/>
           </a:solidFill>
@@ -2866,8 +2871,8 @@
           <a:cs typeface="+mn-cs"/>
         </a:defRPr>
       </a:lvl1pPr>
-      <a:lvl2pPr marL="145207" algn="l" defTabSz="290413" rtl="0" eaLnBrk="1" latinLnBrk="0" hangingPunct="1">
-        <a:defRPr sz="572" kern="1200">
+      <a:lvl2pPr marL="131994" algn="l" defTabSz="263987" rtl="0" eaLnBrk="1" latinLnBrk="0" hangingPunct="1">
+        <a:defRPr sz="520" kern="1200">
           <a:solidFill>
             <a:schemeClr val="tx1"/>
           </a:solidFill>
@@ -2876,8 +2881,8 @@
           <a:cs typeface="+mn-cs"/>
         </a:defRPr>
       </a:lvl2pPr>
-      <a:lvl3pPr marL="290413" algn="l" defTabSz="290413" rtl="0" eaLnBrk="1" latinLnBrk="0" hangingPunct="1">
-        <a:defRPr sz="572" kern="1200">
+      <a:lvl3pPr marL="263987" algn="l" defTabSz="263987" rtl="0" eaLnBrk="1" latinLnBrk="0" hangingPunct="1">
+        <a:defRPr sz="520" kern="1200">
           <a:solidFill>
             <a:schemeClr val="tx1"/>
           </a:solidFill>
@@ -2886,8 +2891,8 @@
           <a:cs typeface="+mn-cs"/>
         </a:defRPr>
       </a:lvl3pPr>
-      <a:lvl4pPr marL="435620" algn="l" defTabSz="290413" rtl="0" eaLnBrk="1" latinLnBrk="0" hangingPunct="1">
-        <a:defRPr sz="572" kern="1200">
+      <a:lvl4pPr marL="395981" algn="l" defTabSz="263987" rtl="0" eaLnBrk="1" latinLnBrk="0" hangingPunct="1">
+        <a:defRPr sz="520" kern="1200">
           <a:solidFill>
             <a:schemeClr val="tx1"/>
           </a:solidFill>
@@ -2896,8 +2901,8 @@
           <a:cs typeface="+mn-cs"/>
         </a:defRPr>
       </a:lvl4pPr>
-      <a:lvl5pPr marL="580827" algn="l" defTabSz="290413" rtl="0" eaLnBrk="1" latinLnBrk="0" hangingPunct="1">
-        <a:defRPr sz="572" kern="1200">
+      <a:lvl5pPr marL="527975" algn="l" defTabSz="263987" rtl="0" eaLnBrk="1" latinLnBrk="0" hangingPunct="1">
+        <a:defRPr sz="520" kern="1200">
           <a:solidFill>
             <a:schemeClr val="tx1"/>
           </a:solidFill>
@@ -2906,8 +2911,8 @@
           <a:cs typeface="+mn-cs"/>
         </a:defRPr>
       </a:lvl5pPr>
-      <a:lvl6pPr marL="726034" algn="l" defTabSz="290413" rtl="0" eaLnBrk="1" latinLnBrk="0" hangingPunct="1">
-        <a:defRPr sz="572" kern="1200">
+      <a:lvl6pPr marL="659968" algn="l" defTabSz="263987" rtl="0" eaLnBrk="1" latinLnBrk="0" hangingPunct="1">
+        <a:defRPr sz="520" kern="1200">
           <a:solidFill>
             <a:schemeClr val="tx1"/>
           </a:solidFill>
@@ -2916,8 +2921,8 @@
           <a:cs typeface="+mn-cs"/>
         </a:defRPr>
       </a:lvl6pPr>
-      <a:lvl7pPr marL="871240" algn="l" defTabSz="290413" rtl="0" eaLnBrk="1" latinLnBrk="0" hangingPunct="1">
-        <a:defRPr sz="572" kern="1200">
+      <a:lvl7pPr marL="791962" algn="l" defTabSz="263987" rtl="0" eaLnBrk="1" latinLnBrk="0" hangingPunct="1">
+        <a:defRPr sz="520" kern="1200">
           <a:solidFill>
             <a:schemeClr val="tx1"/>
           </a:solidFill>
@@ -2926,8 +2931,8 @@
           <a:cs typeface="+mn-cs"/>
         </a:defRPr>
       </a:lvl7pPr>
-      <a:lvl8pPr marL="1016447" algn="l" defTabSz="290413" rtl="0" eaLnBrk="1" latinLnBrk="0" hangingPunct="1">
-        <a:defRPr sz="572" kern="1200">
+      <a:lvl8pPr marL="923955" algn="l" defTabSz="263987" rtl="0" eaLnBrk="1" latinLnBrk="0" hangingPunct="1">
+        <a:defRPr sz="520" kern="1200">
           <a:solidFill>
             <a:schemeClr val="tx1"/>
           </a:solidFill>
@@ -2936,8 +2941,8 @@
           <a:cs typeface="+mn-cs"/>
         </a:defRPr>
       </a:lvl8pPr>
-      <a:lvl9pPr marL="1161654" algn="l" defTabSz="290413" rtl="0" eaLnBrk="1" latinLnBrk="0" hangingPunct="1">
-        <a:defRPr sz="572" kern="1200">
+      <a:lvl9pPr marL="1055949" algn="l" defTabSz="263987" rtl="0" eaLnBrk="1" latinLnBrk="0" hangingPunct="1">
+        <a:defRPr sz="520" kern="1200">
           <a:solidFill>
             <a:schemeClr val="tx1"/>
           </a:solidFill>
@@ -2982,10 +2987,10 @@
         </p:nvGrpSpPr>
         <p:grpSpPr>
           <a:xfrm>
-            <a:off x="174810" y="110591"/>
-            <a:ext cx="5001841" cy="1854168"/>
-            <a:chOff x="3318547" y="2245354"/>
-            <a:chExt cx="5001841" cy="1854168"/>
+            <a:off x="256292" y="38482"/>
+            <a:ext cx="5001841" cy="1852841"/>
+            <a:chOff x="3318547" y="2246681"/>
+            <a:chExt cx="5001841" cy="1852841"/>
           </a:xfrm>
         </p:grpSpPr>
         <p:sp>
@@ -3006,15 +3011,15 @@
               <a:ext cx="4825946" cy="1852841"/>
             </a:xfrm>
             <a:prstGeom prst="roundRect">
-              <a:avLst/>
+              <a:avLst>
+                <a:gd name="adj" fmla="val 0"/>
+              </a:avLst>
             </a:prstGeom>
             <a:solidFill>
-              <a:srgbClr val="D3C0DE"/>
+              <a:srgbClr val="F6BBDB"/>
             </a:solidFill>
             <a:ln>
-              <a:solidFill>
-                <a:srgbClr val="7C4F97"/>
-              </a:solidFill>
+              <a:noFill/>
             </a:ln>
           </p:spPr>
           <p:style>
@@ -3364,8 +3369,8 @@
             </a:p>
           </p:txBody>
         </p:sp>
-        <mc:AlternateContent xmlns:mc="http://schemas.openxmlformats.org/markup-compatibility/2006">
-          <mc:Choice xmlns:a14="http://schemas.microsoft.com/office/drawing/2010/main" Requires="a14">
+        <mc:AlternateContent xmlns:mc="http://schemas.openxmlformats.org/markup-compatibility/2006" xmlns:a14="http://schemas.microsoft.com/office/drawing/2010/main">
+          <mc:Choice Requires="a14">
             <p:sp>
               <p:nvSpPr>
                 <p:cNvPr id="47" name="文本框 46">
@@ -3440,7 +3445,7 @@
               </p:txBody>
             </p:sp>
           </mc:Choice>
-          <mc:Fallback>
+          <mc:Fallback xmlns="">
             <p:sp>
               <p:nvSpPr>
                 <p:cNvPr id="47" name="文本框 46">
@@ -3485,8 +3490,8 @@
             </p:sp>
           </mc:Fallback>
         </mc:AlternateContent>
-        <mc:AlternateContent xmlns:mc="http://schemas.openxmlformats.org/markup-compatibility/2006">
-          <mc:Choice xmlns:a14="http://schemas.microsoft.com/office/drawing/2010/main" Requires="a14">
+        <mc:AlternateContent xmlns:mc="http://schemas.openxmlformats.org/markup-compatibility/2006" xmlns:a14="http://schemas.microsoft.com/office/drawing/2010/main">
+          <mc:Choice Requires="a14">
             <p:sp>
               <p:nvSpPr>
                 <p:cNvPr id="48" name="文本框 47">
@@ -3561,7 +3566,7 @@
               </p:txBody>
             </p:sp>
           </mc:Choice>
-          <mc:Fallback>
+          <mc:Fallback xmlns="">
             <p:sp>
               <p:nvSpPr>
                 <p:cNvPr id="48" name="文本框 47">
@@ -3606,8 +3611,8 @@
             </p:sp>
           </mc:Fallback>
         </mc:AlternateContent>
-        <mc:AlternateContent xmlns:mc="http://schemas.openxmlformats.org/markup-compatibility/2006">
-          <mc:Choice xmlns:a14="http://schemas.microsoft.com/office/drawing/2010/main" Requires="a14">
+        <mc:AlternateContent xmlns:mc="http://schemas.openxmlformats.org/markup-compatibility/2006" xmlns:a14="http://schemas.microsoft.com/office/drawing/2010/main">
+          <mc:Choice Requires="a14">
             <p:sp>
               <p:nvSpPr>
                 <p:cNvPr id="49" name="文本框 48">
@@ -3682,7 +3687,7 @@
               </p:txBody>
             </p:sp>
           </mc:Choice>
-          <mc:Fallback>
+          <mc:Fallback xmlns="">
             <p:sp>
               <p:nvSpPr>
                 <p:cNvPr id="49" name="文本框 48">
@@ -3727,8 +3732,8 @@
             </p:sp>
           </mc:Fallback>
         </mc:AlternateContent>
-        <mc:AlternateContent xmlns:mc="http://schemas.openxmlformats.org/markup-compatibility/2006">
-          <mc:Choice xmlns:a14="http://schemas.microsoft.com/office/drawing/2010/main" Requires="a14">
+        <mc:AlternateContent xmlns:mc="http://schemas.openxmlformats.org/markup-compatibility/2006" xmlns:a14="http://schemas.microsoft.com/office/drawing/2010/main">
+          <mc:Choice Requires="a14">
             <p:sp>
               <p:nvSpPr>
                 <p:cNvPr id="50" name="文本框 49">
@@ -3803,7 +3808,7 @@
               </p:txBody>
             </p:sp>
           </mc:Choice>
-          <mc:Fallback>
+          <mc:Fallback xmlns="">
             <p:sp>
               <p:nvSpPr>
                 <p:cNvPr id="50" name="文本框 49">
@@ -3848,8 +3853,8 @@
             </p:sp>
           </mc:Fallback>
         </mc:AlternateContent>
-        <mc:AlternateContent xmlns:mc="http://schemas.openxmlformats.org/markup-compatibility/2006">
-          <mc:Choice xmlns:a14="http://schemas.microsoft.com/office/drawing/2010/main" Requires="a14">
+        <mc:AlternateContent xmlns:mc="http://schemas.openxmlformats.org/markup-compatibility/2006" xmlns:a14="http://schemas.microsoft.com/office/drawing/2010/main">
+          <mc:Choice Requires="a14">
             <p:sp>
               <p:nvSpPr>
                 <p:cNvPr id="51" name="文本框 50">
@@ -3924,7 +3929,7 @@
               </p:txBody>
             </p:sp>
           </mc:Choice>
-          <mc:Fallback>
+          <mc:Fallback xmlns="">
             <p:sp>
               <p:nvSpPr>
                 <p:cNvPr id="51" name="文本框 50">
@@ -3969,8 +3974,8 @@
             </p:sp>
           </mc:Fallback>
         </mc:AlternateContent>
-        <mc:AlternateContent xmlns:mc="http://schemas.openxmlformats.org/markup-compatibility/2006">
-          <mc:Choice xmlns:a14="http://schemas.microsoft.com/office/drawing/2010/main" Requires="a14">
+        <mc:AlternateContent xmlns:mc="http://schemas.openxmlformats.org/markup-compatibility/2006" xmlns:a14="http://schemas.microsoft.com/office/drawing/2010/main">
+          <mc:Choice Requires="a14">
             <p:sp>
               <p:nvSpPr>
                 <p:cNvPr id="52" name="文本框 51">
@@ -4045,7 +4050,7 @@
               </p:txBody>
             </p:sp>
           </mc:Choice>
-          <mc:Fallback>
+          <mc:Fallback xmlns="">
             <p:sp>
               <p:nvSpPr>
                 <p:cNvPr id="52" name="文本框 51">
@@ -4326,8 +4331,8 @@
             </a:fontRef>
           </p:style>
         </p:cxnSp>
-        <mc:AlternateContent xmlns:mc="http://schemas.openxmlformats.org/markup-compatibility/2006">
-          <mc:Choice xmlns:a14="http://schemas.microsoft.com/office/drawing/2010/main" Requires="a14">
+        <mc:AlternateContent xmlns:mc="http://schemas.openxmlformats.org/markup-compatibility/2006" xmlns:a14="http://schemas.microsoft.com/office/drawing/2010/main">
+          <mc:Choice Requires="a14">
             <p:sp>
               <p:nvSpPr>
                 <p:cNvPr id="58" name="文本框 57">
@@ -4381,7 +4386,7 @@
               </p:txBody>
             </p:sp>
           </mc:Choice>
-          <mc:Fallback>
+          <mc:Fallback xmlns="">
             <p:sp>
               <p:nvSpPr>
                 <p:cNvPr id="58" name="文本框 57">
@@ -4426,8 +4431,8 @@
             </p:sp>
           </mc:Fallback>
         </mc:AlternateContent>
-        <mc:AlternateContent xmlns:mc="http://schemas.openxmlformats.org/markup-compatibility/2006">
-          <mc:Choice xmlns:a14="http://schemas.microsoft.com/office/drawing/2010/main" Requires="a14">
+        <mc:AlternateContent xmlns:mc="http://schemas.openxmlformats.org/markup-compatibility/2006" xmlns:a14="http://schemas.microsoft.com/office/drawing/2010/main">
+          <mc:Choice Requires="a14">
             <p:sp>
               <p:nvSpPr>
                 <p:cNvPr id="59" name="文本框 58">
@@ -4676,7 +4681,7 @@
               </p:txBody>
             </p:sp>
           </mc:Choice>
-          <mc:Fallback>
+          <mc:Fallback xmlns="">
             <p:sp>
               <p:nvSpPr>
                 <p:cNvPr id="59" name="文本框 58">
@@ -4824,8 +4829,8 @@
             </a:fontRef>
           </p:style>
         </p:cxnSp>
-        <mc:AlternateContent xmlns:mc="http://schemas.openxmlformats.org/markup-compatibility/2006">
-          <mc:Choice xmlns:a14="http://schemas.microsoft.com/office/drawing/2010/main" Requires="a14">
+        <mc:AlternateContent xmlns:mc="http://schemas.openxmlformats.org/markup-compatibility/2006" xmlns:a14="http://schemas.microsoft.com/office/drawing/2010/main">
+          <mc:Choice Requires="a14">
             <p:sp>
               <p:nvSpPr>
                 <p:cNvPr id="62" name="文本框 61">
@@ -4880,7 +4885,7 @@
               </p:txBody>
             </p:sp>
           </mc:Choice>
-          <mc:Fallback>
+          <mc:Fallback xmlns="">
             <p:sp>
               <p:nvSpPr>
                 <p:cNvPr id="62" name="文本框 61">
@@ -4925,44 +4930,6 @@
             </p:sp>
           </mc:Fallback>
         </mc:AlternateContent>
-        <p:sp>
-          <p:nvSpPr>
-            <p:cNvPr id="63" name="文本框 62">
-              <a:extLst>
-                <a:ext uri="{FF2B5EF4-FFF2-40B4-BE49-F238E27FC236}">
-                  <a16:creationId xmlns:a16="http://schemas.microsoft.com/office/drawing/2014/main" id="{C21B0175-A3F6-4B30-BB66-C722377067AD}"/>
-                </a:ext>
-              </a:extLst>
-            </p:cNvPr>
-            <p:cNvSpPr txBox="1"/>
-            <p:nvPr/>
-          </p:nvSpPr>
-          <p:spPr>
-            <a:xfrm>
-              <a:off x="4865569" y="2245354"/>
-              <a:ext cx="1630082" cy="291424"/>
-            </a:xfrm>
-            <a:prstGeom prst="rect">
-              <a:avLst/>
-            </a:prstGeom>
-            <a:noFill/>
-          </p:spPr>
-          <p:txBody>
-            <a:bodyPr wrap="square" rtlCol="0">
-              <a:spAutoFit/>
-            </a:bodyPr>
-            <a:lstStyle/>
-            <a:p>
-              <a:r>
-                <a:rPr lang="zh-CN" altLang="en-US" sz="1268" dirty="0">
-                  <a:latin typeface="宋体" panose="02010600030101010101" pitchFamily="2" charset="-122"/>
-                  <a:ea typeface="宋体" panose="02010600030101010101" pitchFamily="2" charset="-122"/>
-                </a:rPr>
-                <a:t>多样性评估模块</a:t>
-              </a:r>
-            </a:p>
-          </p:txBody>
-        </p:sp>
       </p:grpSp>
     </p:spTree>
     <p:extLst>
